--- a/content/decks/media-studies/media-studies-s1-lesson-03-sign-types-and-codes.pptx
+++ b/content/decks/media-studies/media-studies-s1-lesson-03-sign-types-and-codes.pptx
@@ -3405,7 +3405,7 @@
                 <a:ea typeface="Arial" pitchFamily="34" charset="-122"/>
                 <a:cs typeface="Arial" pitchFamily="34" charset="-120"/>
               </a:rPr>
-              <a:t>MOST SIGNS ARE BLENDS</a:t>
+              <a:t>SORT WARS · BLENDS ARE CONTESTED</a:t>
             </a:r>
             <a:endParaRPr lang="en-US" sz="1100" dirty="0"/>
           </a:p>
@@ -4267,7 +4267,7 @@
       </p:grpSpPr>
       <p:pic>
         <p:nvPicPr>
-          <p:cNvPr id="2" name="Image 0" descr="/private/tmp/claude-501/-Users-dogan-Documents-Vaults-Courses/a3a5132d-721f-4cd4-8ddd-e62e2b37b51b/scratchpad/img/crops/caravaggio-matthew_a1777.jpg">    </p:cNvPr>
+          <p:cNvPr id="2" name="Image 0" descr="/Users/dogan/Documents/Vaults/Courses/wiki/classes/media-studies/decks/_build/img/crops/caravaggio-matthew_a1777.jpg">    </p:cNvPr>
           <p:cNvPicPr>
             <a:picLocks noChangeAspect="1"/>
           </p:cNvPicPr>
@@ -6113,7 +6113,7 @@
       </p:grpSpPr>
       <p:pic>
         <p:nvPicPr>
-          <p:cNvPr id="2" name="Image 0" descr="/private/tmp/claude-501/-Users-dogan-Documents-Vaults-Courses/a3a5132d-721f-4cd4-8ddd-e62e2b37b51b/scratchpad/img/crops/caravaggio-thomas_a1777.jpg">    </p:cNvPr>
+          <p:cNvPr id="2" name="Image 0" descr="/Users/dogan/Documents/Vaults/Courses/wiki/classes/media-studies/decks/_build/img/crops/caravaggio-thomas_a1777.jpg">    </p:cNvPr>
           <p:cNvPicPr>
             <a:picLocks noChangeAspect="1"/>
           </p:cNvPicPr>
